--- a/UiPath_AI_Warsztat/UiPath_AI_Warsztaty.pptx
+++ b/UiPath_AI_Warsztat/UiPath_AI_Warsztaty.pptx
@@ -4619,7 +4619,7 @@
           <a:lstStyle/>
           <a:p>
             <a:r>
-              <a:t>Około 4 min. Różnica dotyczy sposobu interakcji, nie dostępu do narzędzi ani poziomu bezpieczeństwa. Agenta konwersacyjnego nie nazywamy chatbotem FAQ: może wykonywać działania przez narzędzia. requesterEmail ustawia aplikacja, nigdy nie bierzemy go z treści rozmowy. Licencje: pula agentów konwersacyjnych może być niedostępna na Community; wtedy praca w parach lub pokaz (preflight, punkt 7).</a:t>
+              <a:t>Około 4 min. Różnica dotyczy sposobu interakcji, nie dostępu do narzędzi ani poziomu bezpieczeństwa. Agenta konwersacyjnego nie nazywamy chatbotem FAQ: może wykonywać działania przez narzędzia. requesterEmail ustawia aplikacja, nigdy nie bierzemy go z treści rozmowy.Gdy czat nie działa u uczestnika: praca w parach lub pokaz (preflight, punkt 7).</a:t>
             </a:r>
           </a:p>
           <a:p>
